--- a/plantilla-8pm.pptx
+++ b/plantilla-8pm.pptx
@@ -255,7 +255,7 @@
           <a:p>
             <a:fld id="{631855BB-C5D2-4F82-B71B-CB3B65D6AB2E}" type="datetimeFigureOut">
               <a:rPr lang="es-ES" smtClean="0"/>
-              <a:t>08/03/2026</a:t>
+              <a:t>15/03/2026</a:t>
             </a:fld>
             <a:endParaRPr lang="es-ES"/>
           </a:p>
@@ -326,138 +326,6 @@
           <a:chExt cx="0" cy="0"/>
         </a:xfrm>
       </p:grpSpPr>
-      <p:sp>
-        <p:nvSpPr>
-          <p:cNvPr id="11" name="object 8">
-            <a:extLst>
-              <a:ext uri="{FF2B5EF4-FFF2-40B4-BE49-F238E27FC236}">
-                <a16:creationId xmlns:a16="http://schemas.microsoft.com/office/drawing/2014/main" id="{11F865FE-5386-4787-95C7-B13A153E4858}"/>
-              </a:ext>
-            </a:extLst>
-          </p:cNvPr>
-          <p:cNvSpPr txBox="1"/>
-          <p:nvPr userDrawn="1"/>
-        </p:nvSpPr>
-        <p:spPr>
-          <a:xfrm>
-            <a:off x="3795395" y="3337106"/>
-            <a:ext cx="4601210" cy="331470"/>
-          </a:xfrm>
-          <a:prstGeom prst="rect">
-            <a:avLst/>
-          </a:prstGeom>
-        </p:spPr>
-        <p:txBody>
-          <a:bodyPr vert="horz" wrap="square" lIns="0" tIns="13335" rIns="0" bIns="0" rtlCol="0">
-            <a:spAutoFit/>
-          </a:bodyPr>
-          <a:lstStyle/>
-          <a:p>
-            <a:pPr marL="12700" algn="ctr">
-              <a:lnSpc>
-                <a:spcPct val="100000"/>
-              </a:lnSpc>
-              <a:spcBef>
-                <a:spcPts val="105"/>
-              </a:spcBef>
-            </a:pPr>
-            <a:r>
-              <a:rPr sz="2000" dirty="0">
-                <a:solidFill>
-                  <a:srgbClr val="FFFFFF"/>
-                </a:solidFill>
-                <a:latin typeface="Calibri"/>
-                <a:cs typeface="Calibri"/>
-              </a:rPr>
-              <a:t>VP</a:t>
-            </a:r>
-            <a:r>
-              <a:rPr sz="2000" spc="150" dirty="0">
-                <a:solidFill>
-                  <a:srgbClr val="FFFFFF"/>
-                </a:solidFill>
-                <a:latin typeface="Calibri"/>
-                <a:cs typeface="Calibri"/>
-              </a:rPr>
-              <a:t> </a:t>
-            </a:r>
-            <a:r>
-              <a:rPr sz="2000" spc="55" dirty="0">
-                <a:solidFill>
-                  <a:srgbClr val="FFFFFF"/>
-                </a:solidFill>
-                <a:latin typeface="Calibri"/>
-                <a:cs typeface="Calibri"/>
-              </a:rPr>
-              <a:t>EMPRESAS</a:t>
-            </a:r>
-            <a:r>
-              <a:rPr sz="2000" spc="150" dirty="0">
-                <a:solidFill>
-                  <a:srgbClr val="FFFFFF"/>
-                </a:solidFill>
-                <a:latin typeface="Calibri"/>
-                <a:cs typeface="Calibri"/>
-              </a:rPr>
-              <a:t> </a:t>
-            </a:r>
-            <a:r>
-              <a:rPr sz="2000" dirty="0">
-                <a:solidFill>
-                  <a:srgbClr val="FFFFFF"/>
-                </a:solidFill>
-                <a:latin typeface="Calibri"/>
-                <a:cs typeface="Calibri"/>
-              </a:rPr>
-              <a:t>Y</a:t>
-            </a:r>
-            <a:r>
-              <a:rPr sz="2000" spc="150" dirty="0">
-                <a:solidFill>
-                  <a:srgbClr val="FFFFFF"/>
-                </a:solidFill>
-                <a:latin typeface="Calibri"/>
-                <a:cs typeface="Calibri"/>
-              </a:rPr>
-              <a:t> </a:t>
-            </a:r>
-            <a:r>
-              <a:rPr sz="2000" spc="55" dirty="0">
-                <a:solidFill>
-                  <a:srgbClr val="FFFFFF"/>
-                </a:solidFill>
-                <a:latin typeface="Calibri"/>
-                <a:cs typeface="Calibri"/>
-              </a:rPr>
-              <a:t>CIUDADES</a:t>
-            </a:r>
-            <a:r>
-              <a:rPr sz="2000" spc="125" dirty="0">
-                <a:solidFill>
-                  <a:srgbClr val="FFFFFF"/>
-                </a:solidFill>
-                <a:latin typeface="Calibri"/>
-                <a:cs typeface="Calibri"/>
-              </a:rPr>
-              <a:t> </a:t>
-            </a:r>
-            <a:r>
-              <a:rPr sz="2000" spc="50" dirty="0">
-                <a:solidFill>
-                  <a:srgbClr val="FFFFFF"/>
-                </a:solidFill>
-                <a:latin typeface="Calibri"/>
-                <a:cs typeface="Calibri"/>
-              </a:rPr>
-              <a:t>INTELIGENTES</a:t>
-            </a:r>
-            <a:endParaRPr sz="2000" dirty="0">
-              <a:latin typeface="Calibri"/>
-              <a:cs typeface="Calibri"/>
-            </a:endParaRPr>
-          </a:p>
-        </p:txBody>
-      </p:sp>
       <p:sp>
         <p:nvSpPr>
           <p:cNvPr id="14" name="Rectángulo 13">
@@ -671,6 +539,138 @@
                 <a:srgbClr val="FFFFFF"/>
               </a:solidFill>
               <a:latin typeface="Calibri" panose="020F0502020204030204" pitchFamily="34" charset="0"/>
+              <a:cs typeface="Calibri"/>
+            </a:endParaRPr>
+          </a:p>
+        </p:txBody>
+      </p:sp>
+      <p:sp>
+        <p:nvSpPr>
+          <p:cNvPr id="7" name="object 8">
+            <a:extLst>
+              <a:ext uri="{FF2B5EF4-FFF2-40B4-BE49-F238E27FC236}">
+                <a16:creationId xmlns:a16="http://schemas.microsoft.com/office/drawing/2014/main" id="{4249BE49-C3E4-4BA7-9362-DD10AA25ED63}"/>
+              </a:ext>
+            </a:extLst>
+          </p:cNvPr>
+          <p:cNvSpPr txBox="1"/>
+          <p:nvPr userDrawn="1"/>
+        </p:nvSpPr>
+        <p:spPr>
+          <a:xfrm>
+            <a:off x="3795395" y="2107329"/>
+            <a:ext cx="4601210" cy="331470"/>
+          </a:xfrm>
+          <a:prstGeom prst="rect">
+            <a:avLst/>
+          </a:prstGeom>
+        </p:spPr>
+        <p:txBody>
+          <a:bodyPr vert="horz" wrap="square" lIns="0" tIns="13335" rIns="0" bIns="0" rtlCol="0">
+            <a:spAutoFit/>
+          </a:bodyPr>
+          <a:lstStyle/>
+          <a:p>
+            <a:pPr marL="12700" algn="ctr">
+              <a:lnSpc>
+                <a:spcPct val="100000"/>
+              </a:lnSpc>
+              <a:spcBef>
+                <a:spcPts val="105"/>
+              </a:spcBef>
+            </a:pPr>
+            <a:r>
+              <a:rPr sz="2000" dirty="0">
+                <a:solidFill>
+                  <a:srgbClr val="FFFFFF"/>
+                </a:solidFill>
+                <a:latin typeface="Calibri"/>
+                <a:cs typeface="Calibri"/>
+              </a:rPr>
+              <a:t>VP</a:t>
+            </a:r>
+            <a:r>
+              <a:rPr sz="2000" spc="150" dirty="0">
+                <a:solidFill>
+                  <a:srgbClr val="FFFFFF"/>
+                </a:solidFill>
+                <a:latin typeface="Calibri"/>
+                <a:cs typeface="Calibri"/>
+              </a:rPr>
+              <a:t> </a:t>
+            </a:r>
+            <a:r>
+              <a:rPr sz="2000" spc="55" dirty="0">
+                <a:solidFill>
+                  <a:srgbClr val="FFFFFF"/>
+                </a:solidFill>
+                <a:latin typeface="Calibri"/>
+                <a:cs typeface="Calibri"/>
+              </a:rPr>
+              <a:t>EMPRESAS</a:t>
+            </a:r>
+            <a:r>
+              <a:rPr sz="2000" spc="150" dirty="0">
+                <a:solidFill>
+                  <a:srgbClr val="FFFFFF"/>
+                </a:solidFill>
+                <a:latin typeface="Calibri"/>
+                <a:cs typeface="Calibri"/>
+              </a:rPr>
+              <a:t> </a:t>
+            </a:r>
+            <a:r>
+              <a:rPr sz="2000" dirty="0">
+                <a:solidFill>
+                  <a:srgbClr val="FFFFFF"/>
+                </a:solidFill>
+                <a:latin typeface="Calibri"/>
+                <a:cs typeface="Calibri"/>
+              </a:rPr>
+              <a:t>Y</a:t>
+            </a:r>
+            <a:r>
+              <a:rPr sz="2000" spc="150" dirty="0">
+                <a:solidFill>
+                  <a:srgbClr val="FFFFFF"/>
+                </a:solidFill>
+                <a:latin typeface="Calibri"/>
+                <a:cs typeface="Calibri"/>
+              </a:rPr>
+              <a:t> </a:t>
+            </a:r>
+            <a:r>
+              <a:rPr sz="2000" spc="55" dirty="0">
+                <a:solidFill>
+                  <a:srgbClr val="FFFFFF"/>
+                </a:solidFill>
+                <a:latin typeface="Calibri"/>
+                <a:cs typeface="Calibri"/>
+              </a:rPr>
+              <a:t>CIUDADES</a:t>
+            </a:r>
+            <a:r>
+              <a:rPr sz="2000" spc="125" dirty="0">
+                <a:solidFill>
+                  <a:srgbClr val="FFFFFF"/>
+                </a:solidFill>
+                <a:latin typeface="Calibri"/>
+                <a:cs typeface="Calibri"/>
+              </a:rPr>
+              <a:t> </a:t>
+            </a:r>
+            <a:r>
+              <a:rPr sz="2000" spc="50" dirty="0">
+                <a:solidFill>
+                  <a:srgbClr val="FFFFFF"/>
+                </a:solidFill>
+                <a:latin typeface="Calibri"/>
+                <a:cs typeface="Calibri"/>
+              </a:rPr>
+              <a:t>INTELIGENTES</a:t>
+            </a:r>
+            <a:endParaRPr sz="2000" dirty="0">
+              <a:latin typeface="Calibri"/>
               <a:cs typeface="Calibri"/>
             </a:endParaRPr>
           </a:p>
@@ -17030,10 +17030,10 @@
       </p:grpSpPr>
       <p:sp>
         <p:nvSpPr>
-          <p:cNvPr id="2" name="txtFecha">
+          <p:cNvPr id="3" name="txtFecha">
             <a:extLst>
               <a:ext uri="{FF2B5EF4-FFF2-40B4-BE49-F238E27FC236}">
-                <a16:creationId xmlns:a16="http://schemas.microsoft.com/office/drawing/2014/main" id="{47749C0C-BA9B-4C48-B76C-C15316BD7B23}"/>
+                <a16:creationId xmlns:a16="http://schemas.microsoft.com/office/drawing/2014/main" id="{96A6E893-284F-4771-B41D-AA2850B7442C}"/>
               </a:ext>
             </a:extLst>
           </p:cNvPr>
@@ -17042,7 +17042,7 @@
         </p:nvSpPr>
         <p:spPr>
           <a:xfrm>
-            <a:off x="3584983" y="4085150"/>
+            <a:off x="3584983" y="3243789"/>
             <a:ext cx="5022034" cy="370422"/>
           </a:xfrm>
           <a:prstGeom prst="rect">
@@ -18447,6 +18447,37 @@
           <a:chExt cx="0" cy="0"/>
         </a:xfrm>
       </p:grpSpPr>
+      <p:sp>
+        <p:nvSpPr>
+          <p:cNvPr id="2" name="txt-D26">
+            <a:extLst>
+              <a:ext uri="{FF2B5EF4-FFF2-40B4-BE49-F238E27FC236}">
+                <a16:creationId xmlns:a16="http://schemas.microsoft.com/office/drawing/2014/main" id="{756C83A9-7BFE-4AF0-9069-CE9F2E6D7659}"/>
+              </a:ext>
+            </a:extLst>
+          </p:cNvPr>
+          <p:cNvSpPr/>
+          <p:nvPr/>
+        </p:nvSpPr>
+        <p:spPr>
+          <a:xfrm>
+            <a:off x="1062952" y="1315946"/>
+            <a:ext cx="5033048" cy="369332"/>
+          </a:xfrm>
+          <a:prstGeom prst="rect">
+            <a:avLst/>
+          </a:prstGeom>
+        </p:spPr>
+        <p:txBody>
+          <a:bodyPr wrap="square">
+            <a:spAutoFit/>
+          </a:bodyPr>
+          <a:lstStyle/>
+          <a:p>
+            <a:endParaRPr lang="es-CO" dirty="0"/>
+          </a:p>
+        </p:txBody>
+      </p:sp>
     </p:spTree>
     <p:extLst>
       <p:ext uri="{BB962C8B-B14F-4D97-AF65-F5344CB8AC3E}">
@@ -19206,8 +19237,8 @@
         </p:nvSpPr>
         <p:spPr>
           <a:xfrm>
-            <a:off x="6708618" y="1015998"/>
-            <a:ext cx="4427695" cy="338554"/>
+            <a:off x="6708619" y="1015998"/>
+            <a:ext cx="4327556" cy="338554"/>
           </a:xfrm>
           <a:prstGeom prst="rect">
             <a:avLst/>
@@ -19357,10 +19388,10 @@
       </p:grpSpPr>
       <p:sp>
         <p:nvSpPr>
-          <p:cNvPr id="2" name="imgMarco-D9-1">
+          <p:cNvPr id="4" name="imgMarco-D9-1">
             <a:extLst>
               <a:ext uri="{FF2B5EF4-FFF2-40B4-BE49-F238E27FC236}">
-                <a16:creationId xmlns:a16="http://schemas.microsoft.com/office/drawing/2014/main" id="{39F5A094-6E80-42EC-9BD5-AF8D12A8F6C4}"/>
+                <a16:creationId xmlns:a16="http://schemas.microsoft.com/office/drawing/2014/main" id="{595EFBA8-2579-492C-B28D-8FCB8B02356B}"/>
               </a:ext>
             </a:extLst>
           </p:cNvPr>
@@ -19369,8 +19400,8 @@
         </p:nvSpPr>
         <p:spPr>
           <a:xfrm>
-            <a:off x="1198684" y="1436460"/>
-            <a:ext cx="5510091" cy="4537530"/>
+            <a:off x="1198685" y="1436460"/>
+            <a:ext cx="5473578" cy="4537530"/>
           </a:xfrm>
           <a:prstGeom prst="rect">
             <a:avLst/>
@@ -19405,10 +19436,10 @@
       </p:sp>
       <p:sp>
         <p:nvSpPr>
-          <p:cNvPr id="3" name="imgMarco-D9-2">
+          <p:cNvPr id="5" name="imgMarco-D9-2">
             <a:extLst>
               <a:ext uri="{FF2B5EF4-FFF2-40B4-BE49-F238E27FC236}">
-                <a16:creationId xmlns:a16="http://schemas.microsoft.com/office/drawing/2014/main" id="{CF6B7B07-901B-4A7E-8C0B-D20A66F47ED8}"/>
+                <a16:creationId xmlns:a16="http://schemas.microsoft.com/office/drawing/2014/main" id="{995A9574-FD7A-458E-968B-8193101AD8DE}"/>
               </a:ext>
             </a:extLst>
           </p:cNvPr>
@@ -19417,8 +19448,8 @@
         </p:nvSpPr>
         <p:spPr>
           <a:xfrm>
-            <a:off x="6851650" y="1436460"/>
-            <a:ext cx="4141666" cy="4537530"/>
+            <a:off x="6735777" y="1988910"/>
+            <a:ext cx="4400535" cy="3432630"/>
           </a:xfrm>
           <a:prstGeom prst="rect">
             <a:avLst/>
